--- a/lessons/3-3/slides.pptx
+++ b/lessons/3-3/slides.pptx
@@ -10684,7 +10684,7 @@
       </p:sp>
       <p:sp>
         <p:nvSpPr>
-          <p:cNvPr id="20" name="Shape 18"/>
+          <p:cNvPr id="20" name="Text 18"/>
           <p:cNvSpPr/>
           <p:nvPr/>
         </p:nvSpPr>
@@ -10705,33 +10705,7 @@
             <a:solidFill>
               <a:srgbClr val="D6DBDF"/>
             </a:solidFill>
-            <a:prstDash val="solid"/>
           </a:ln>
-          <a:effectLst>
-            <a:outerShdw sx="100000" sy="100000" kx="0" ky="0" algn="bl" rotWithShape="0" blurRad="50800" dist="12700" dir="5400000">
-              <a:srgbClr val="1C2E42">
-                <a:alpha val="10000"/>
-              </a:srgbClr>
-            </a:outerShdw>
-          </a:effectLst>
-        </p:spPr>
-      </p:sp>
-      <p:sp>
-        <p:nvSpPr>
-          <p:cNvPr id="21" name="Text 19"/>
-          <p:cNvSpPr/>
-          <p:nvPr/>
-        </p:nvSpPr>
-        <p:spPr>
-          <a:xfrm>
-            <a:off x="685800" y="1481328"/>
-            <a:ext cx="1447800" cy="384048"/>
-          </a:xfrm>
-          <a:prstGeom prst="rect">
-            <a:avLst/>
-          </a:prstGeom>
-          <a:noFill/>
-          <a:ln/>
         </p:spPr>
         <p:txBody>
           <a:bodyPr wrap="square" rtlCol="0" anchor="ctr"/>
@@ -10741,7 +10715,7 @@
               <a:buNone/>
             </a:pPr>
             <a:r>
-              <a:rPr lang="en-US" sz="900" dirty="0">
+              <a:rPr lang="en-US" sz="900" b="1" dirty="0">
                 <a:solidFill>
                   <a:srgbClr val="17324D"/>
                 </a:solidFill>
@@ -10757,7 +10731,7 @@
       </p:sp>
       <p:sp>
         <p:nvSpPr>
-          <p:cNvPr id="22" name="Shape 20"/>
+          <p:cNvPr id="21" name="Text 19"/>
           <p:cNvSpPr/>
           <p:nvPr/>
         </p:nvSpPr>
@@ -10778,33 +10752,7 @@
             <a:solidFill>
               <a:srgbClr val="D6DBDF"/>
             </a:solidFill>
-            <a:prstDash val="solid"/>
           </a:ln>
-          <a:effectLst>
-            <a:outerShdw sx="100000" sy="100000" kx="0" ky="0" algn="bl" rotWithShape="0" blurRad="50800" dist="12700" dir="5400000">
-              <a:srgbClr val="1C2E42">
-                <a:alpha val="10000"/>
-              </a:srgbClr>
-            </a:outerShdw>
-          </a:effectLst>
-        </p:spPr>
-      </p:sp>
-      <p:sp>
-        <p:nvSpPr>
-          <p:cNvPr id="23" name="Text 21"/>
-          <p:cNvSpPr/>
-          <p:nvPr/>
-        </p:nvSpPr>
-        <p:spPr>
-          <a:xfrm>
-            <a:off x="2453640" y="1481328"/>
-            <a:ext cx="1447800" cy="384048"/>
-          </a:xfrm>
-          <a:prstGeom prst="rect">
-            <a:avLst/>
-          </a:prstGeom>
-          <a:noFill/>
-          <a:ln/>
         </p:spPr>
         <p:txBody>
           <a:bodyPr wrap="square" rtlCol="0" anchor="ctr"/>
@@ -10814,7 +10762,7 @@
               <a:buNone/>
             </a:pPr>
             <a:r>
-              <a:rPr lang="en-US" sz="900" dirty="0">
+              <a:rPr lang="en-US" sz="900" b="1" dirty="0">
                 <a:solidFill>
                   <a:srgbClr val="17324D"/>
                 </a:solidFill>
@@ -10830,7 +10778,7 @@
       </p:sp>
       <p:sp>
         <p:nvSpPr>
-          <p:cNvPr id="24" name="Shape 22"/>
+          <p:cNvPr id="22" name="Text 20"/>
           <p:cNvSpPr/>
           <p:nvPr/>
         </p:nvSpPr>
@@ -10851,33 +10799,7 @@
             <a:solidFill>
               <a:srgbClr val="D6DBDF"/>
             </a:solidFill>
-            <a:prstDash val="solid"/>
           </a:ln>
-          <a:effectLst>
-            <a:outerShdw sx="100000" sy="100000" kx="0" ky="0" algn="bl" rotWithShape="0" blurRad="50800" dist="12700" dir="5400000">
-              <a:srgbClr val="1C2E42">
-                <a:alpha val="10000"/>
-              </a:srgbClr>
-            </a:outerShdw>
-          </a:effectLst>
-        </p:spPr>
-      </p:sp>
-      <p:sp>
-        <p:nvSpPr>
-          <p:cNvPr id="25" name="Text 23"/>
-          <p:cNvSpPr/>
-          <p:nvPr/>
-        </p:nvSpPr>
-        <p:spPr>
-          <a:xfrm>
-            <a:off x="4221480" y="1481328"/>
-            <a:ext cx="1447800" cy="384048"/>
-          </a:xfrm>
-          <a:prstGeom prst="rect">
-            <a:avLst/>
-          </a:prstGeom>
-          <a:noFill/>
-          <a:ln/>
         </p:spPr>
         <p:txBody>
           <a:bodyPr wrap="square" rtlCol="0" anchor="ctr"/>
@@ -10887,7 +10809,7 @@
               <a:buNone/>
             </a:pPr>
             <a:r>
-              <a:rPr lang="en-US" sz="900" dirty="0">
+              <a:rPr lang="en-US" sz="900" b="1" dirty="0">
                 <a:solidFill>
                   <a:srgbClr val="17324D"/>
                 </a:solidFill>
@@ -10903,7 +10825,7 @@
       </p:sp>
       <p:sp>
         <p:nvSpPr>
-          <p:cNvPr id="26" name="Shape 24"/>
+          <p:cNvPr id="23" name="Text 21"/>
           <p:cNvSpPr/>
           <p:nvPr/>
         </p:nvSpPr>
@@ -10924,33 +10846,7 @@
             <a:solidFill>
               <a:srgbClr val="D6DBDF"/>
             </a:solidFill>
-            <a:prstDash val="solid"/>
           </a:ln>
-          <a:effectLst>
-            <a:outerShdw sx="100000" sy="100000" kx="0" ky="0" algn="bl" rotWithShape="0" blurRad="50800" dist="12700" dir="5400000">
-              <a:srgbClr val="1C2E42">
-                <a:alpha val="10000"/>
-              </a:srgbClr>
-            </a:outerShdw>
-          </a:effectLst>
-        </p:spPr>
-      </p:sp>
-      <p:sp>
-        <p:nvSpPr>
-          <p:cNvPr id="27" name="Text 25"/>
-          <p:cNvSpPr/>
-          <p:nvPr/>
-        </p:nvSpPr>
-        <p:spPr>
-          <a:xfrm>
-            <a:off x="685800" y="1975104"/>
-            <a:ext cx="1447800" cy="384048"/>
-          </a:xfrm>
-          <a:prstGeom prst="rect">
-            <a:avLst/>
-          </a:prstGeom>
-          <a:noFill/>
-          <a:ln/>
         </p:spPr>
         <p:txBody>
           <a:bodyPr wrap="square" rtlCol="0" anchor="ctr"/>
@@ -10960,7 +10856,7 @@
               <a:buNone/>
             </a:pPr>
             <a:r>
-              <a:rPr lang="en-US" sz="900" dirty="0">
+              <a:rPr lang="en-US" sz="900" b="1" dirty="0">
                 <a:solidFill>
                   <a:srgbClr val="17324D"/>
                 </a:solidFill>
@@ -10976,7 +10872,7 @@
       </p:sp>
       <p:sp>
         <p:nvSpPr>
-          <p:cNvPr id="28" name="Shape 26"/>
+          <p:cNvPr id="24" name="Shape 22"/>
           <p:cNvSpPr/>
           <p:nvPr/>
         </p:nvSpPr>
@@ -11010,7 +10906,7 @@
       </p:sp>
       <p:sp>
         <p:nvSpPr>
-          <p:cNvPr id="29" name="Text 27"/>
+          <p:cNvPr id="25" name="Text 23"/>
           <p:cNvSpPr/>
           <p:nvPr/>
         </p:nvSpPr>
@@ -11051,7 +10947,7 @@
       </p:sp>
       <p:sp>
         <p:nvSpPr>
-          <p:cNvPr id="30" name="Shape 28"/>
+          <p:cNvPr id="26" name="Shape 24"/>
           <p:cNvSpPr/>
           <p:nvPr/>
         </p:nvSpPr>
@@ -11085,7 +10981,7 @@
       </p:sp>
       <p:sp>
         <p:nvSpPr>
-          <p:cNvPr id="31" name="Text 29"/>
+          <p:cNvPr id="27" name="Text 25"/>
           <p:cNvSpPr/>
           <p:nvPr/>
         </p:nvSpPr>
@@ -11126,7 +11022,7 @@
       </p:sp>
       <p:sp>
         <p:nvSpPr>
-          <p:cNvPr id="32" name="Shape 30"/>
+          <p:cNvPr id="28" name="Shape 26"/>
           <p:cNvSpPr/>
           <p:nvPr/>
         </p:nvSpPr>
@@ -11160,7 +11056,7 @@
       </p:sp>
       <p:sp>
         <p:nvSpPr>
-          <p:cNvPr id="33" name="Text 31"/>
+          <p:cNvPr id="29" name="Text 27"/>
           <p:cNvSpPr/>
           <p:nvPr/>
         </p:nvSpPr>
@@ -11201,7 +11097,7 @@
       </p:sp>
       <p:sp>
         <p:nvSpPr>
-          <p:cNvPr id="34" name="Text 32"/>
+          <p:cNvPr id="30" name="Text 28"/>
           <p:cNvSpPr/>
           <p:nvPr/>
         </p:nvSpPr>
@@ -11240,7 +11136,7 @@
       </p:sp>
       <p:sp>
         <p:nvSpPr>
-          <p:cNvPr id="35" name="Shape 33"/>
+          <p:cNvPr id="31" name="Shape 29"/>
           <p:cNvSpPr/>
           <p:nvPr/>
         </p:nvSpPr>
@@ -11263,7 +11159,7 @@
       </p:sp>
       <p:sp>
         <p:nvSpPr>
-          <p:cNvPr id="36" name="Shape 34"/>
+          <p:cNvPr id="32" name="Shape 30"/>
           <p:cNvSpPr/>
           <p:nvPr/>
         </p:nvSpPr>
@@ -11286,7 +11182,7 @@
       </p:sp>
       <p:sp>
         <p:nvSpPr>
-          <p:cNvPr id="37" name="Shape 35"/>
+          <p:cNvPr id="33" name="Shape 31"/>
           <p:cNvSpPr/>
           <p:nvPr/>
         </p:nvSpPr>
@@ -11309,7 +11205,7 @@
       </p:sp>
       <p:sp>
         <p:nvSpPr>
-          <p:cNvPr id="38" name="Shape 36"/>
+          <p:cNvPr id="34" name="Shape 32"/>
           <p:cNvSpPr/>
           <p:nvPr/>
         </p:nvSpPr>
@@ -11332,7 +11228,7 @@
       </p:sp>
       <p:sp>
         <p:nvSpPr>
-          <p:cNvPr id="39" name="Shape 37"/>
+          <p:cNvPr id="35" name="Shape 33"/>
           <p:cNvSpPr/>
           <p:nvPr/>
         </p:nvSpPr>

--- a/lessons/3-3/slides.pptx
+++ b/lessons/3-3/slides.pptx
@@ -2495,7 +2495,7 @@
                 <a:ea typeface="Outfit" pitchFamily="34" charset="-122"/>
                 <a:cs typeface="Outfit" pitchFamily="34" charset="-120"/>
               </a:rPr>
-              <a:t>6.RP.3a</a:t>
+              <a:t>6.AT.3a</a:t>
             </a:r>
             <a:endParaRPr lang="en-US" sz="1000" dirty="0"/>
           </a:p>
@@ -3218,7 +3218,7 @@
                 <a:ea typeface="Outfit" pitchFamily="34" charset="-122"/>
                 <a:cs typeface="Outfit" pitchFamily="34" charset="-120"/>
               </a:rPr>
-              <a:t>6.RP.3a</a:t>
+              <a:t>6.AT.3a</a:t>
             </a:r>
             <a:endParaRPr lang="en-US" sz="900" dirty="0"/>
           </a:p>
@@ -4328,7 +4328,7 @@
                 <a:ea typeface="Outfit" pitchFamily="34" charset="-122"/>
                 <a:cs typeface="Outfit" pitchFamily="34" charset="-120"/>
               </a:rPr>
-              <a:t>6.RP.3a</a:t>
+              <a:t>6.AT.3a</a:t>
             </a:r>
             <a:endParaRPr lang="en-US" sz="900" dirty="0"/>
           </a:p>
@@ -5664,7 +5664,7 @@
                 <a:ea typeface="Outfit" pitchFamily="34" charset="-122"/>
                 <a:cs typeface="Outfit" pitchFamily="34" charset="-120"/>
               </a:rPr>
-              <a:t>6.RP.3a</a:t>
+              <a:t>6.AT.3a</a:t>
             </a:r>
             <a:endParaRPr lang="en-US" sz="900" dirty="0"/>
           </a:p>
@@ -6958,7 +6958,7 @@
                 <a:ea typeface="Outfit" pitchFamily="34" charset="-122"/>
                 <a:cs typeface="Outfit" pitchFamily="34" charset="-120"/>
               </a:rPr>
-              <a:t>6.RP.3a</a:t>
+              <a:t>6.AT.3a</a:t>
             </a:r>
             <a:endParaRPr lang="en-US" sz="900" dirty="0"/>
           </a:p>
@@ -8020,7 +8020,7 @@
                 <a:ea typeface="Outfit" pitchFamily="34" charset="-122"/>
                 <a:cs typeface="Outfit" pitchFamily="34" charset="-120"/>
               </a:rPr>
-              <a:t>6.RP.3a</a:t>
+              <a:t>6.AT.3a</a:t>
             </a:r>
             <a:endParaRPr lang="en-US" sz="900" dirty="0"/>
           </a:p>
@@ -8985,7 +8985,7 @@
                 <a:ea typeface="Outfit" pitchFamily="34" charset="-122"/>
                 <a:cs typeface="Outfit" pitchFamily="34" charset="-120"/>
               </a:rPr>
-              <a:t>6.RP.3a</a:t>
+              <a:t>6.AT.3a</a:t>
             </a:r>
             <a:endParaRPr lang="en-US" sz="900" dirty="0"/>
           </a:p>
@@ -9902,7 +9902,7 @@
                 <a:ea typeface="Outfit" pitchFamily="34" charset="-122"/>
                 <a:cs typeface="Outfit" pitchFamily="34" charset="-120"/>
               </a:rPr>
-              <a:t>6.RP.3a</a:t>
+              <a:t>6.AT.3a</a:t>
             </a:r>
             <a:endParaRPr lang="en-US" sz="900" dirty="0"/>
           </a:p>
@@ -11030,7 +11030,7 @@
                 <a:ea typeface="Outfit" pitchFamily="34" charset="-122"/>
                 <a:cs typeface="Outfit" pitchFamily="34" charset="-120"/>
               </a:rPr>
-              <a:t>6.RP.3a</a:t>
+              <a:t>6.AT.3a</a:t>
             </a:r>
             <a:endParaRPr lang="en-US" sz="900" dirty="0"/>
           </a:p>
@@ -12463,7 +12463,7 @@
                 <a:ea typeface="Outfit" pitchFamily="34" charset="-122"/>
                 <a:cs typeface="Outfit" pitchFamily="34" charset="-120"/>
               </a:rPr>
-              <a:t>6.RP.3a</a:t>
+              <a:t>6.AT.3a</a:t>
             </a:r>
             <a:endParaRPr lang="en-US" sz="900" dirty="0"/>
           </a:p>
@@ -13277,7 +13277,7 @@
                 <a:ea typeface="Outfit" pitchFamily="34" charset="-122"/>
                 <a:cs typeface="Outfit" pitchFamily="34" charset="-120"/>
               </a:rPr>
-              <a:t>6.RP.3a</a:t>
+              <a:t>6.AT.3a</a:t>
             </a:r>
             <a:endParaRPr lang="en-US" sz="900" dirty="0"/>
           </a:p>
@@ -14290,7 +14290,7 @@
                 <a:ea typeface="Outfit" pitchFamily="34" charset="-122"/>
                 <a:cs typeface="Outfit" pitchFamily="34" charset="-120"/>
               </a:rPr>
-              <a:t>6.RP.3a</a:t>
+              <a:t>6.AT.3a</a:t>
             </a:r>
             <a:endParaRPr lang="en-US" sz="900" dirty="0"/>
           </a:p>
@@ -15397,7 +15397,7 @@
                 <a:ea typeface="Outfit" pitchFamily="34" charset="-122"/>
                 <a:cs typeface="Outfit" pitchFamily="34" charset="-120"/>
               </a:rPr>
-              <a:t>6.RP.3a</a:t>
+              <a:t>6.AT.3a</a:t>
             </a:r>
             <a:endParaRPr lang="en-US" sz="900" dirty="0"/>
           </a:p>
@@ -16457,7 +16457,7 @@
                 <a:ea typeface="Outfit" pitchFamily="34" charset="-122"/>
                 <a:cs typeface="Outfit" pitchFamily="34" charset="-120"/>
               </a:rPr>
-              <a:t>6.RP.3a</a:t>
+              <a:t>6.AT.3a</a:t>
             </a:r>
             <a:endParaRPr lang="en-US" sz="900" dirty="0"/>
           </a:p>
@@ -17517,7 +17517,7 @@
                 <a:ea typeface="Outfit" pitchFamily="34" charset="-122"/>
                 <a:cs typeface="Outfit" pitchFamily="34" charset="-120"/>
               </a:rPr>
-              <a:t>6.RP.3a</a:t>
+              <a:t>6.AT.3a</a:t>
             </a:r>
             <a:endParaRPr lang="en-US" sz="900" dirty="0"/>
           </a:p>
@@ -18505,7 +18505,7 @@
                 <a:ea typeface="Outfit" pitchFamily="34" charset="-122"/>
                 <a:cs typeface="Outfit" pitchFamily="34" charset="-120"/>
               </a:rPr>
-              <a:t>6.RP.3a</a:t>
+              <a:t>6.AT.3a</a:t>
             </a:r>
             <a:endParaRPr lang="en-US" sz="900" dirty="0"/>
           </a:p>
@@ -20443,7 +20443,7 @@
                 <a:ea typeface="Outfit" pitchFamily="34" charset="-122"/>
                 <a:cs typeface="Outfit" pitchFamily="34" charset="-120"/>
               </a:rPr>
-              <a:t>6.RP.3a</a:t>
+              <a:t>6.AT.3a</a:t>
             </a:r>
             <a:endParaRPr lang="en-US" sz="900" dirty="0"/>
           </a:p>

--- a/lessons/3-3/slides.pptx
+++ b/lessons/3-3/slides.pptx
@@ -694,7 +694,7 @@
           <a:p>
             <a:r>
               <a:rPr lang="en-US" dirty="0"/>
-              <a:t>Answer key — The ordered pairs should be (2, 1), (4, 2), (6, 3) — cookies go on x and milk on y, matching the table's column order.</a:t>
+              <a:t>Answer key — 2 × 3 = 6 cups of honey (multiply, don't add the scale factor)</a:t>
             </a:r>
             <a:endParaRPr lang="en-US" dirty="0"/>
           </a:p>
@@ -2452,7 +2452,7 @@
                 <a:ea typeface="Outfit" pitchFamily="34" charset="-122"/>
                 <a:cs typeface="Outfit" pitchFamily="34" charset="-120"/>
               </a:rPr>
-              <a:t>Graph Ratio Tables</a:t>
+              <a:t>Ratio Tables</a:t>
             </a:r>
             <a:endParaRPr lang="en-US" sz="3000" dirty="0"/>
           </a:p>
@@ -2534,7 +2534,7 @@
                 <a:ea typeface="Hanken Grotesk" pitchFamily="34" charset="-122"/>
                 <a:cs typeface="Hanken Grotesk" pitchFamily="34" charset="-120"/>
               </a:rPr>
-              <a:t>Unit 3  ·  Lesson 3-3</a:t>
+              <a:t>Unit 3  ·  Lesson 3-2</a:t>
             </a:r>
             <a:endParaRPr lang="en-US" sz="1000" dirty="0"/>
           </a:p>
@@ -2919,7 +2919,7 @@
                 <a:ea typeface="Hanken Grotesk" pitchFamily="34" charset="-122"/>
                 <a:cs typeface="Hanken Grotesk" pitchFamily="34" charset="-120"/>
               </a:rPr>
-              <a:t>I can graph the values from a ratio table as points on the coordinate plane.</a:t>
+              <a:t>I can use a ratio table to find equivalent ratios.</a:t>
             </a:r>
             <a:endParaRPr lang="en-US" sz="1100" dirty="0"/>
           </a:p>
@@ -3045,7 +3045,7 @@
                 <a:ea typeface="Hanken Grotesk" pitchFamily="34" charset="-122"/>
                 <a:cs typeface="Hanken Grotesk" pitchFamily="34" charset="-120"/>
               </a:rPr>
-              <a:t>I can explain my graph using the words coordinate plane, ordered pair, origin, and proportional.</a:t>
+              <a:t>I can explain my table using the words ratio table, equivalent ratio, scale factor, and pattern.</a:t>
             </a:r>
             <a:endParaRPr lang="en-US" sz="1050" dirty="0"/>
           </a:p>
@@ -3437,7 +3437,7 @@
                 <a:ea typeface="Hanken Grotesk" pitchFamily="34" charset="-122"/>
                 <a:cs typeface="Hanken Grotesk" pitchFamily="34" charset="-120"/>
               </a:rPr>
-              <a:t>Reveal Math Grade 6  ·  Unit 3  ·  Lesson 3-3</a:t>
+              <a:t>Reveal Math Grade 6  ·  Unit 3  ·  Lesson 3-2</a:t>
             </a:r>
             <a:endParaRPr lang="en-US" sz="750" dirty="0"/>
           </a:p>
@@ -3549,7 +3549,7 @@
                 <a:ea typeface="Outfit" pitchFamily="34" charset="-122"/>
                 <a:cs typeface="Outfit" pitchFamily="34" charset="-120"/>
               </a:rPr>
-              <a:t>The ratio table shows sundaes to ounces of chocolate sauce (1 sundae = 2 oz). Plot each ordered pair on the coordinate grid.</a:t>
+              <a:t>Chef Reyes's pancake recipe uses 2 cups of mix for every 3 cups of milk. Complete the ratio table to scale the recipe for more students.</a:t>
             </a:r>
             <a:endParaRPr lang="en-US" sz="1050" dirty="0"/>
           </a:p>
@@ -4040,7 +4040,7 @@
                 <a:ea typeface="Hanken Grotesk" pitchFamily="34" charset="-122"/>
                 <a:cs typeface="Hanken Grotesk" pitchFamily="34" charset="-120"/>
               </a:rPr>
-              <a:t>After plotting (1,2), (2,4), (3,6)... what pattern do you notice, and how does it show the chocolate-sauce ratio?</a:t>
+              <a:t>In your pancake ratio table, how did you find each new row from the 2:3 starting row?</a:t>
             </a:r>
             <a:endParaRPr lang="en-US" sz="1000" dirty="0"/>
           </a:p>
@@ -4547,7 +4547,7 @@
                 <a:ea typeface="Hanken Grotesk" pitchFamily="34" charset="-122"/>
                 <a:cs typeface="Hanken Grotesk" pitchFamily="34" charset="-120"/>
               </a:rPr>
-              <a:t>Reveal Math Grade 6  ·  Unit 3  ·  Lesson 3-3</a:t>
+              <a:t>Reveal Math Grade 6  ·  Unit 3  ·  Lesson 3-2</a:t>
             </a:r>
             <a:endParaRPr lang="en-US" sz="750" dirty="0"/>
           </a:p>
@@ -4702,7 +4702,7 @@
                 <a:ea typeface="Outfit" pitchFamily="34" charset="-122"/>
                 <a:cs typeface="Outfit" pitchFamily="34" charset="-120"/>
               </a:rPr>
-              <a:t>Find Jada's Mistake</a:t>
+              <a:t>Find Devon's Mistake</a:t>
             </a:r>
             <a:endParaRPr lang="en-US" sz="1100" dirty="0"/>
           </a:p>
@@ -4867,7 +4867,7 @@
                 <a:ea typeface="Hanken Grotesk" pitchFamily="34" charset="-122"/>
                 <a:cs typeface="Hanken Grotesk" pitchFamily="34" charset="-120"/>
               </a:rPr>
-              <a:t>Read the ratio table:  </a:t>
+              <a:t>Read the problem:  </a:t>
             </a:r>
             <a:pPr indent="0" marL="0">
               <a:buNone/>
@@ -4881,7 +4881,7 @@
                 <a:ea typeface="Courier New" pitchFamily="34" charset="-122"/>
                 <a:cs typeface="Courier New" pitchFamily="34" charset="-120"/>
               </a:rPr>
-              <a:t>Cookies: 2, 4, 6 | Cups of milk: 1, 2, 3</a:t>
+              <a:t>A recipe uses 5 cups of oats for every 2 cups of honey. Complete the table for 3 batches.</a:t>
             </a:r>
             <a:endParaRPr lang="en-US" sz="950" dirty="0"/>
           </a:p>
@@ -4934,7 +4934,7 @@
                 <a:ea typeface="Hanken Grotesk" pitchFamily="34" charset="-122"/>
                 <a:cs typeface="Hanken Grotesk" pitchFamily="34" charset="-120"/>
               </a:rPr>
-              <a:t>Write ordered pairs:  </a:t>
+              <a:t>Find the scale factor:  </a:t>
             </a:r>
             <a:pPr indent="0" marL="0">
               <a:buNone/>
@@ -4948,7 +4948,7 @@
                 <a:ea typeface="Courier New" pitchFamily="34" charset="-122"/>
                 <a:cs typeface="Courier New" pitchFamily="34" charset="-120"/>
               </a:rPr>
-              <a:t>(1, 2), (2, 4), (3, 6)</a:t>
+              <a:t>3 batches → multiply by 3</a:t>
             </a:r>
             <a:endParaRPr lang="en-US" sz="950" dirty="0"/>
           </a:p>
@@ -5001,7 +5001,7 @@
                 <a:ea typeface="Hanken Grotesk" pitchFamily="34" charset="-122"/>
                 <a:cs typeface="Hanken Grotesk" pitchFamily="34" charset="-120"/>
               </a:rPr>
-              <a:t>Plot the points:  </a:t>
+              <a:t>Scale the oats:  </a:t>
             </a:r>
             <a:pPr indent="0" marL="0">
               <a:buNone/>
@@ -5015,7 +5015,7 @@
                 <a:ea typeface="Courier New" pitchFamily="34" charset="-122"/>
                 <a:cs typeface="Courier New" pitchFamily="34" charset="-120"/>
               </a:rPr>
-              <a:t>Plotted (1,2), (2,4), (3,6) on the grid</a:t>
+              <a:t>5 × 3 = 15 cups of oats</a:t>
             </a:r>
             <a:endParaRPr lang="en-US" sz="950" dirty="0"/>
           </a:p>
@@ -5068,7 +5068,7 @@
                 <a:ea typeface="Hanken Grotesk" pitchFamily="34" charset="-122"/>
                 <a:cs typeface="Hanken Grotesk" pitchFamily="34" charset="-120"/>
               </a:rPr>
-              <a:t>Conclusion:  </a:t>
+              <a:t>Scale the honey:  </a:t>
             </a:r>
             <a:pPr indent="0" marL="0">
               <a:buNone/>
@@ -5082,7 +5082,7 @@
                 <a:ea typeface="Courier New" pitchFamily="34" charset="-122"/>
                 <a:cs typeface="Courier New" pitchFamily="34" charset="-120"/>
               </a:rPr>
-              <a:t>The x-axis is cookies and y-axis is cups of milk</a:t>
+              <a:t>2 + 3 = 5 cups of honey</a:t>
             </a:r>
             <a:endParaRPr lang="en-US" sz="950" dirty="0"/>
           </a:p>
@@ -5883,7 +5883,7 @@
                 <a:ea typeface="Hanken Grotesk" pitchFamily="34" charset="-122"/>
                 <a:cs typeface="Hanken Grotesk" pitchFamily="34" charset="-120"/>
               </a:rPr>
-              <a:t>Reveal Math Grade 6  ·  Unit 3  ·  Lesson 3-3</a:t>
+              <a:t>Reveal Math Grade 6  ·  Unit 3  ·  Lesson 3-2</a:t>
             </a:r>
             <a:endParaRPr lang="en-US" sz="750" dirty="0"/>
           </a:p>
@@ -6095,7 +6095,7 @@
                 <a:ea typeface="Hanken Grotesk" pitchFamily="34" charset="-122"/>
                 <a:cs typeface="Hanken Grotesk" pitchFamily="34" charset="-120"/>
               </a:rPr>
-              <a:t>The recipe uses 2 ounces of sauce for every 1 sundae.</a:t>
+              <a:t>The pancake recipe is 2 cups of mix for every 3 cups of milk, so the ratio is 2:3.</a:t>
             </a:r>
             <a:endParaRPr lang="en-US" sz="1050" dirty="0"/>
           </a:p>
@@ -6193,7 +6193,7 @@
                 <a:ea typeface="Hanken Grotesk" pitchFamily="34" charset="-122"/>
                 <a:cs typeface="Hanken Grotesk" pitchFamily="34" charset="-120"/>
               </a:rPr>
-              <a:t>I put sundaes on the x-axis and ounces of sauce on the y-axis.</a:t>
+              <a:t>To make 2 batches, my scale factor is 2.</a:t>
             </a:r>
             <a:endParaRPr lang="en-US" sz="1050" dirty="0"/>
           </a:p>
@@ -6291,7 +6291,7 @@
                 <a:ea typeface="Hanken Grotesk" pitchFamily="34" charset="-122"/>
                 <a:cs typeface="Hanken Grotesk" pitchFamily="34" charset="-120"/>
               </a:rPr>
-              <a:t>For 1 sundae I need 2 ounces, so I plot the ordered pair (1, 2): right 1, up 2.</a:t>
+              <a:t>I multiply both numbers by 2: 2 x 2 = 4 cups of mix, and 3 x 2 = 6 cups of milk.</a:t>
             </a:r>
             <a:endParaRPr lang="en-US" sz="1050" dirty="0"/>
           </a:p>
@@ -6389,7 +6389,7 @@
                 <a:ea typeface="Hanken Grotesk" pitchFamily="34" charset="-122"/>
                 <a:cs typeface="Hanken Grotesk" pitchFamily="34" charset="-120"/>
               </a:rPr>
-              <a:t>For 2 sundaes I need 4 ounces, so I plot (2, 4): right 2, up 4.</a:t>
+              <a:t>Now my row is 4:6, which is the same ratio as 2:3.</a:t>
             </a:r>
             <a:endParaRPr lang="en-US" sz="1050" dirty="0"/>
           </a:p>
@@ -6487,7 +6487,7 @@
                 <a:ea typeface="Hanken Grotesk" pitchFamily="34" charset="-122"/>
                 <a:cs typeface="Hanken Grotesk" pitchFamily="34" charset="-120"/>
               </a:rPr>
-              <a:t>When I connect (1, 2), (2, 4), (3, 6), they form a straight line through the origin (0, 0).</a:t>
+              <a:t>I do NOT add 2 to each number; I multiply both by the same factor.</a:t>
             </a:r>
             <a:endParaRPr lang="en-US" sz="1050" dirty="0"/>
           </a:p>
@@ -7177,7 +7177,7 @@
                 <a:ea typeface="Hanken Grotesk" pitchFamily="34" charset="-122"/>
                 <a:cs typeface="Hanken Grotesk" pitchFamily="34" charset="-120"/>
               </a:rPr>
-              <a:t>Reveal Math Grade 6  ·  Unit 3  ·  Lesson 3-3</a:t>
+              <a:t>Reveal Math Grade 6  ·  Unit 3  ·  Lesson 3-2</a:t>
             </a:r>
             <a:endParaRPr lang="en-US" sz="750" dirty="0"/>
           </a:p>
@@ -7403,7 +7403,7 @@
                 <a:ea typeface="Hanken Grotesk" pitchFamily="34" charset="-122"/>
                 <a:cs typeface="Hanken Grotesk" pitchFamily="34" charset="-120"/>
               </a:rPr>
-              <a:t>Sketch a model for today's problem. Label it using Coordinate plane and Ordered pair.</a:t>
+              <a:t>Sketch a model for today's problem. Label it using Ratio table and Equivalent ratio.</a:t>
             </a:r>
             <a:endParaRPr lang="en-US" sz="1000" dirty="0"/>
           </a:p>
@@ -7551,7 +7551,7 @@
                 <a:ea typeface="Hanken Grotesk" pitchFamily="34" charset="-122"/>
                 <a:cs typeface="Hanken Grotesk" pitchFamily="34" charset="-120"/>
               </a:rPr>
-              <a:t>In 2–3 sentences, explain "The points from equal ratios form a straight line that passes through the origin (0, 0)." in your own words.</a:t>
+              <a:t>In 2–3 sentences, explain "To keep a ratio the same, multiply both numbers by the same scale factor." in your own words.</a:t>
             </a:r>
             <a:endParaRPr lang="en-US" sz="1000" dirty="0"/>
           </a:p>
@@ -7847,7 +7847,7 @@
                 <a:ea typeface="Hanken Grotesk" pitchFamily="34" charset="-122"/>
                 <a:cs typeface="Hanken Grotesk" pitchFamily="34" charset="-120"/>
               </a:rPr>
-              <a:t>Write your own problem that uses Coordinate plane, then solve it and make an answer key.</a:t>
+              <a:t>Write your own problem that uses Ratio table, then solve it and make an answer key.</a:t>
             </a:r>
             <a:endParaRPr lang="en-US" sz="1000" dirty="0"/>
           </a:p>
@@ -8239,7 +8239,7 @@
                 <a:ea typeface="Hanken Grotesk" pitchFamily="34" charset="-122"/>
                 <a:cs typeface="Hanken Grotesk" pitchFamily="34" charset="-120"/>
               </a:rPr>
-              <a:t>Reveal Math Grade 6  ·  Unit 3  ·  Lesson 3-3</a:t>
+              <a:t>Reveal Math Grade 6  ·  Unit 3  ·  Lesson 3-2</a:t>
             </a:r>
             <a:endParaRPr lang="en-US" sz="750" dirty="0"/>
           </a:p>
@@ -8408,7 +8408,7 @@
                 <a:ea typeface="Hanken Grotesk" pitchFamily="34" charset="-122"/>
                 <a:cs typeface="Hanken Grotesk" pitchFamily="34" charset="-120"/>
               </a:rPr>
-              <a:t>Points from a ratio table are plotted at (1, 4), (2, 8), and (3, 12). What is the ratio of y to x for each point?</a:t>
+              <a:t>In a ratio table, the ratio of sugar to butter is 3:2. If you use 12 cups of sugar, how many cups of butter do you need?</a:t>
             </a:r>
             <a:endParaRPr lang="en-US" sz="1050" dirty="0"/>
           </a:p>
@@ -8484,7 +8484,7 @@
                 <a:ea typeface="Hanken Grotesk" pitchFamily="34" charset="-122"/>
                 <a:cs typeface="Hanken Grotesk" pitchFamily="34" charset="-120"/>
               </a:rPr>
-              <a:t>Two students graph ratio tables. Student A plots (1,2), (2,4), (3,6). Student B plots (1,3), (2,6), (3,9). Whose line is steeper?</a:t>
+              <a:t>A ratio table shows 5:8, 10:16, 15:24. What scale factor was used from the first row to the third row?</a:t>
             </a:r>
             <a:endParaRPr lang="en-US" sz="1050" dirty="0"/>
           </a:p>
@@ -8560,7 +8560,7 @@
                 <a:ea typeface="Hanken Grotesk" pitchFamily="34" charset="-122"/>
                 <a:cs typeface="Hanken Grotesk" pitchFamily="34" charset="-120"/>
               </a:rPr>
-              <a:t>A ratio table shows (2, 6), (4, 12), and (6, 18). Which ordered pair comes next if the pattern continues?</a:t>
+              <a:t>A recipe uses 3 eggs for every 5 cups of flour. How many eggs are needed for 15 cups of flour?</a:t>
             </a:r>
             <a:endParaRPr lang="en-US" sz="1050" dirty="0"/>
           </a:p>
@@ -8697,7 +8697,7 @@
                 <a:ea typeface="Hanken Grotesk" pitchFamily="34" charset="-122"/>
                 <a:cs typeface="Hanken Grotesk" pitchFamily="34" charset="-120"/>
               </a:rPr>
-              <a:t>The food truck plots tacos vs. salsa and gets a straight line. What does that graph tell the owner about preparing salsa for ANY number of tacos?</a:t>
+              <a:t>The juice bar makes a smoothie with 3 scoops of berries for every 2 cups of yogurt and needs enough for 20 people. How is this the same as our pancake table?</a:t>
             </a:r>
             <a:endParaRPr lang="en-US" sz="1000" dirty="0"/>
           </a:p>
@@ -9204,7 +9204,7 @@
                 <a:ea typeface="Hanken Grotesk" pitchFamily="34" charset="-122"/>
                 <a:cs typeface="Hanken Grotesk" pitchFamily="34" charset="-120"/>
               </a:rPr>
-              <a:t>Reveal Math Grade 6  ·  Unit 3  ·  Lesson 3-3</a:t>
+              <a:t>Reveal Math Grade 6  ·  Unit 3  ·  Lesson 3-2</a:t>
             </a:r>
             <a:endParaRPr lang="en-US" sz="750" dirty="0"/>
           </a:p>
@@ -9408,7 +9408,7 @@
                 <a:ea typeface="Hanken Grotesk" pitchFamily="34" charset="-122"/>
                 <a:cs typeface="Hanken Grotesk" pitchFamily="34" charset="-120"/>
               </a:rPr>
-              <a:t>Today's key idea is "The points from equal ratios form a straight line that passes through the origin (0, 0)." — and it works because ___.</a:t>
+              <a:t>Today's key idea is "To keep a ratio the same, multiply both numbers by the same scale factor." — and it works because ___.</a:t>
             </a:r>
             <a:endParaRPr lang="en-US" sz="1050" dirty="0"/>
           </a:p>
@@ -9557,7 +9557,7 @@
                 <a:ea typeface="Hanken Grotesk" pitchFamily="34" charset="-122"/>
                 <a:cs typeface="Hanken Grotesk" pitchFamily="34" charset="-120"/>
               </a:rPr>
-              <a:t>Because Coordinate plane means ___, but a tricky part is ___, so I have to ___.</a:t>
+              <a:t>Because Ratio table means ___, but a tricky part is ___, so I have to ___.</a:t>
             </a:r>
             <a:endParaRPr lang="en-US" sz="1050" dirty="0"/>
           </a:p>
@@ -9706,7 +9706,7 @@
                 <a:ea typeface="Hanken Grotesk" pitchFamily="34" charset="-122"/>
                 <a:cs typeface="Hanken Grotesk" pitchFamily="34" charset="-120"/>
               </a:rPr>
-              <a:t>A common mistake with Coordinate plane is ___. It happens because ___, and the fix is ___.</a:t>
+              <a:t>A common mistake with Ratio table is ___. It happens because ___, and the fix is ___.</a:t>
             </a:r>
             <a:endParaRPr lang="en-US" sz="1050" dirty="0"/>
           </a:p>
@@ -10121,7 +10121,7 @@
                 <a:ea typeface="Hanken Grotesk" pitchFamily="34" charset="-122"/>
                 <a:cs typeface="Hanken Grotesk" pitchFamily="34" charset="-120"/>
               </a:rPr>
-              <a:t>Reveal Math Grade 6  ·  Unit 3  ·  Lesson 3-3</a:t>
+              <a:t>Reveal Math Grade 6  ·  Unit 3  ·  Lesson 3-2</a:t>
             </a:r>
             <a:endParaRPr lang="en-US" sz="750" dirty="0"/>
           </a:p>
@@ -10579,7 +10579,7 @@
                 <a:ea typeface="Hanken Grotesk" pitchFamily="34" charset="-122"/>
                 <a:cs typeface="Hanken Grotesk" pitchFamily="34" charset="-120"/>
               </a:rPr>
-              <a:t>A ratio table shows cups of rice to cups of water: (1, 2), (2, 4), (3, 6). If you plot these points, the line passes through which point?</a:t>
+              <a:t>A salad dressing recipe uses 2 tablespoons of oil for every 5 tablespoons of vinegar. How many tablespoons of oil are needed for 20 tablespoons of vinegar?</a:t>
             </a:r>
             <a:endParaRPr lang="en-US" sz="1050" dirty="0"/>
           </a:p>
@@ -10618,7 +10618,7 @@
                 <a:ea typeface="Hanken Grotesk" pitchFamily="34" charset="-122"/>
                 <a:cs typeface="Hanken Grotesk" pitchFamily="34" charset="-120"/>
               </a:rPr>
-              <a:t>A.  (5, 10)</a:t>
+              <a:t>A.  8</a:t>
             </a:r>
             <a:endParaRPr lang="en-US" sz="1000" dirty="0"/>
           </a:p>
@@ -10657,7 +10657,7 @@
                 <a:ea typeface="Hanken Grotesk" pitchFamily="34" charset="-122"/>
                 <a:cs typeface="Hanken Grotesk" pitchFamily="34" charset="-120"/>
               </a:rPr>
-              <a:t>B.  (4, 6)</a:t>
+              <a:t>B.  10</a:t>
             </a:r>
             <a:endParaRPr lang="en-US" sz="1000" dirty="0"/>
           </a:p>
@@ -10696,7 +10696,7 @@
                 <a:ea typeface="Hanken Grotesk" pitchFamily="34" charset="-122"/>
                 <a:cs typeface="Hanken Grotesk" pitchFamily="34" charset="-120"/>
               </a:rPr>
-              <a:t>C.  (5, 8)</a:t>
+              <a:t>C.  7</a:t>
             </a:r>
             <a:endParaRPr lang="en-US" sz="1000" dirty="0"/>
           </a:p>
@@ -10735,7 +10735,7 @@
                 <a:ea typeface="Hanken Grotesk" pitchFamily="34" charset="-122"/>
                 <a:cs typeface="Hanken Grotesk" pitchFamily="34" charset="-120"/>
               </a:rPr>
-              <a:t>D.  (6, 10)</a:t>
+              <a:t>D.  12</a:t>
             </a:r>
             <a:endParaRPr lang="en-US" sz="1000" dirty="0"/>
           </a:p>
@@ -11249,7 +11249,7 @@
                 <a:ea typeface="Hanken Grotesk" pitchFamily="34" charset="-122"/>
                 <a:cs typeface="Hanken Grotesk" pitchFamily="34" charset="-120"/>
               </a:rPr>
-              <a:t>Reveal Math Grade 6  ·  Unit 3  ·  Lesson 3-3</a:t>
+              <a:t>Reveal Math Grade 6  ·  Unit 3  ·  Lesson 3-2</a:t>
             </a:r>
             <a:endParaRPr lang="en-US" sz="750" dirty="0"/>
           </a:p>
@@ -11363,7 +11363,7 @@
                 <a:ea typeface="Hanken Grotesk" pitchFamily="34" charset="-122"/>
                 <a:cs typeface="Hanken Grotesk" pitchFamily="34" charset="-120"/>
               </a:rPr>
-              <a:t>I can graph the values from a ratio table as points on the coordinate plane.</a:t>
+              <a:t>I can use a ratio table to find equivalent ratios.</a:t>
             </a:r>
             <a:endParaRPr lang="en-US" sz="1100" dirty="0"/>
           </a:p>
@@ -12682,7 +12682,7 @@
                 <a:ea typeface="Hanken Grotesk" pitchFamily="34" charset="-122"/>
                 <a:cs typeface="Hanken Grotesk" pitchFamily="34" charset="-120"/>
               </a:rPr>
-              <a:t>Reveal Math Grade 6  ·  Unit 3  ·  Lesson 3-3</a:t>
+              <a:t>Reveal Math Grade 6  ·  Unit 3  ·  Lesson 3-2</a:t>
             </a:r>
             <a:endParaRPr lang="en-US" sz="750" dirty="0"/>
           </a:p>
@@ -12932,7 +12932,7 @@
                 <a:ea typeface="Hanken Grotesk" pitchFamily="34" charset="-122"/>
                 <a:cs typeface="Hanken Grotesk" pitchFamily="34" charset="-120"/>
               </a:rPr>
-              <a:t>I can graph the values from a ratio table as points on the coordinate plane.</a:t>
+              <a:t>I can use a ratio table to find equivalent ratios.</a:t>
             </a:r>
             <a:endParaRPr lang="en-US" sz="1800" dirty="0"/>
           </a:p>
@@ -13104,7 +13104,7 @@
                 <a:ea typeface="Hanken Grotesk" pitchFamily="34" charset="-122"/>
                 <a:cs typeface="Hanken Grotesk" pitchFamily="34" charset="-120"/>
               </a:rPr>
-              <a:t>I can explain my graph using the words coordinate plane, ordered pair, origin, and proportional.</a:t>
+              <a:t>I can explain my table using the words ratio table, equivalent ratio, scale factor, and pattern.</a:t>
             </a:r>
             <a:endParaRPr lang="en-US" sz="1700" dirty="0"/>
           </a:p>
@@ -13496,7 +13496,7 @@
                 <a:ea typeface="Hanken Grotesk" pitchFamily="34" charset="-122"/>
                 <a:cs typeface="Hanken Grotesk" pitchFamily="34" charset="-120"/>
               </a:rPr>
-              <a:t>Reveal Math Grade 6  ·  Unit 3  ·  Lesson 3-3</a:t>
+              <a:t>Reveal Math Grade 6  ·  Unit 3  ·  Lesson 3-2</a:t>
             </a:r>
             <a:endParaRPr lang="en-US" sz="750" dirty="0"/>
           </a:p>
@@ -13693,7 +13693,7 @@
                 <a:ea typeface="Hanken Grotesk" pitchFamily="34" charset="-122"/>
                 <a:cs typeface="Hanken Grotesk" pitchFamily="34" charset="-120"/>
               </a:rPr>
-              <a:t>The sundae recipe uses 2 ounces of chocolate sauce for every 1 sundae. Before you graph, what do you predict the points will look like, and which quantity goes on each axis?</a:t>
+              <a:t>Chef Reyes's pancake batter uses 2 cups of mix for every 3 cups of milk. To feed 4 times as many people, what happens to BOTH ingredient amounts?</a:t>
             </a:r>
             <a:endParaRPr lang="en-US" sz="1400" dirty="0"/>
           </a:p>
@@ -14023,7 +14023,7 @@
                 <a:ea typeface="Hanken Grotesk" pitchFamily="34" charset="-122"/>
                 <a:cs typeface="Hanken Grotesk" pitchFamily="34" charset="-120"/>
               </a:rPr>
-              <a:t>Coordinate plane</a:t>
+              <a:t>Ratio table</a:t>
             </a:r>
             <a:endParaRPr lang="en-US" sz="900" dirty="0"/>
           </a:p>
@@ -14070,7 +14070,7 @@
                 <a:ea typeface="Hanken Grotesk" pitchFamily="34" charset="-122"/>
                 <a:cs typeface="Hanken Grotesk" pitchFamily="34" charset="-120"/>
               </a:rPr>
-              <a:t>Ordered pair</a:t>
+              <a:t>Equivalent ratio</a:t>
             </a:r>
             <a:endParaRPr lang="en-US" sz="900" dirty="0"/>
           </a:p>
@@ -14117,7 +14117,7 @@
                 <a:ea typeface="Hanken Grotesk" pitchFamily="34" charset="-122"/>
                 <a:cs typeface="Hanken Grotesk" pitchFamily="34" charset="-120"/>
               </a:rPr>
-              <a:t>Origin</a:t>
+              <a:t>Scale factor</a:t>
             </a:r>
             <a:endParaRPr lang="en-US" sz="900" dirty="0"/>
           </a:p>
@@ -14509,7 +14509,7 @@
                 <a:ea typeface="Hanken Grotesk" pitchFamily="34" charset="-122"/>
                 <a:cs typeface="Hanken Grotesk" pitchFamily="34" charset="-120"/>
               </a:rPr>
-              <a:t>Reveal Math Grade 6  ·  Unit 3  ·  Lesson 3-3</a:t>
+              <a:t>Reveal Math Grade 6  ·  Unit 3  ·  Lesson 3-2</a:t>
             </a:r>
             <a:endParaRPr lang="en-US" sz="750" dirty="0"/>
           </a:p>
@@ -14706,7 +14706,7 @@
                 <a:ea typeface="Hanken Grotesk" pitchFamily="34" charset="-122"/>
                 <a:cs typeface="Hanken Grotesk" pitchFamily="34" charset="-120"/>
               </a:rPr>
-              <a:t>After plotting (1,2), (2,4), (3,6)... what pattern do you notice, and how does it show the chocolate-sauce ratio?</a:t>
+              <a:t>In your pancake ratio table, how did you find each new row from the 2:3 starting row?</a:t>
             </a:r>
             <a:endParaRPr lang="en-US" sz="1400" dirty="0"/>
           </a:p>
@@ -15036,7 +15036,7 @@
                 <a:ea typeface="Hanken Grotesk" pitchFamily="34" charset="-122"/>
                 <a:cs typeface="Hanken Grotesk" pitchFamily="34" charset="-120"/>
               </a:rPr>
-              <a:t>Coordinate plane</a:t>
+              <a:t>Ratio table</a:t>
             </a:r>
             <a:endParaRPr lang="en-US" sz="900" dirty="0"/>
           </a:p>
@@ -15083,7 +15083,7 @@
                 <a:ea typeface="Hanken Grotesk" pitchFamily="34" charset="-122"/>
                 <a:cs typeface="Hanken Grotesk" pitchFamily="34" charset="-120"/>
               </a:rPr>
-              <a:t>Ordered pair</a:t>
+              <a:t>Equivalent ratio</a:t>
             </a:r>
             <a:endParaRPr lang="en-US" sz="900" dirty="0"/>
           </a:p>
@@ -15130,7 +15130,7 @@
                 <a:ea typeface="Hanken Grotesk" pitchFamily="34" charset="-122"/>
                 <a:cs typeface="Hanken Grotesk" pitchFamily="34" charset="-120"/>
               </a:rPr>
-              <a:t>Linear pattern</a:t>
+              <a:t>Scale factor</a:t>
             </a:r>
             <a:endParaRPr lang="en-US" sz="900" dirty="0"/>
           </a:p>
@@ -15177,54 +15177,7 @@
                 <a:ea typeface="Hanken Grotesk" pitchFamily="34" charset="-122"/>
                 <a:cs typeface="Hanken Grotesk" pitchFamily="34" charset="-120"/>
               </a:rPr>
-              <a:t>Proportional</a:t>
-            </a:r>
-            <a:endParaRPr lang="en-US" sz="900" dirty="0"/>
-          </a:p>
-        </p:txBody>
-      </p:sp>
-      <p:sp>
-        <p:nvSpPr>
-          <p:cNvPr id="32" name="Text 30"/>
-          <p:cNvSpPr/>
-          <p:nvPr/>
-        </p:nvSpPr>
-        <p:spPr>
-          <a:xfrm>
-            <a:off x="6263640" y="3666744"/>
-            <a:ext cx="1120140" cy="329184"/>
-          </a:xfrm>
-          <a:prstGeom prst="roundRect">
-            <a:avLst>
-              <a:gd name="adj" fmla="val 13889"/>
-            </a:avLst>
-          </a:prstGeom>
-          <a:solidFill>
-            <a:srgbClr val="FFFFFF"/>
-          </a:solidFill>
-          <a:ln w="12700">
-            <a:solidFill>
-              <a:srgbClr val="D6DBDF"/>
-            </a:solidFill>
-          </a:ln>
-        </p:spPr>
-        <p:txBody>
-          <a:bodyPr wrap="square" rtlCol="0" anchor="ctr"/>
-          <a:lstStyle/>
-          <a:p>
-            <a:pPr algn="ctr" indent="0" marL="0">
-              <a:buNone/>
-            </a:pPr>
-            <a:r>
-              <a:rPr lang="en-US" sz="900" b="1" dirty="0">
-                <a:solidFill>
-                  <a:srgbClr val="17324D"/>
-                </a:solidFill>
-                <a:latin typeface="Hanken Grotesk" pitchFamily="34" charset="0"/>
-                <a:ea typeface="Hanken Grotesk" pitchFamily="34" charset="-122"/>
-                <a:cs typeface="Hanken Grotesk" pitchFamily="34" charset="-120"/>
-              </a:rPr>
-              <a:t>Origin</a:t>
+              <a:t>Pattern</a:t>
             </a:r>
             <a:endParaRPr lang="en-US" sz="900" dirty="0"/>
           </a:p>
@@ -15616,7 +15569,7 @@
                 <a:ea typeface="Hanken Grotesk" pitchFamily="34" charset="-122"/>
                 <a:cs typeface="Hanken Grotesk" pitchFamily="34" charset="-120"/>
               </a:rPr>
-              <a:t>Reveal Math Grade 6  ·  Unit 3  ·  Lesson 3-3</a:t>
+              <a:t>Reveal Math Grade 6  ·  Unit 3  ·  Lesson 3-2</a:t>
             </a:r>
             <a:endParaRPr lang="en-US" sz="750" dirty="0"/>
           </a:p>
@@ -15813,7 +15766,7 @@
                 <a:ea typeface="Hanken Grotesk" pitchFamily="34" charset="-122"/>
                 <a:cs typeface="Hanken Grotesk" pitchFamily="34" charset="-120"/>
               </a:rPr>
-              <a:t>The food truck plots tacos vs. salsa and gets a straight line. What does that graph tell the owner about preparing salsa for ANY number of tacos?</a:t>
+              <a:t>The juice bar makes a smoothie with 3 scoops of berries for every 2 cups of yogurt and needs enough for 20 people. How is this the same as our pancake table?</a:t>
             </a:r>
             <a:endParaRPr lang="en-US" sz="1400" dirty="0"/>
           </a:p>
@@ -16143,7 +16096,7 @@
                 <a:ea typeface="Hanken Grotesk" pitchFamily="34" charset="-122"/>
                 <a:cs typeface="Hanken Grotesk" pitchFamily="34" charset="-120"/>
               </a:rPr>
-              <a:t>Coordinate plane</a:t>
+              <a:t>Ratio table</a:t>
             </a:r>
             <a:endParaRPr lang="en-US" sz="900" dirty="0"/>
           </a:p>
@@ -16190,7 +16143,7 @@
                 <a:ea typeface="Hanken Grotesk" pitchFamily="34" charset="-122"/>
                 <a:cs typeface="Hanken Grotesk" pitchFamily="34" charset="-120"/>
               </a:rPr>
-              <a:t>Ordered pair</a:t>
+              <a:t>Equivalent ratio</a:t>
             </a:r>
             <a:endParaRPr lang="en-US" sz="900" dirty="0"/>
           </a:p>
@@ -16237,7 +16190,7 @@
                 <a:ea typeface="Hanken Grotesk" pitchFamily="34" charset="-122"/>
                 <a:cs typeface="Hanken Grotesk" pitchFamily="34" charset="-120"/>
               </a:rPr>
-              <a:t>Proportional</a:t>
+              <a:t>Scale factor</a:t>
             </a:r>
             <a:endParaRPr lang="en-US" sz="900" dirty="0"/>
           </a:p>
@@ -16284,7 +16237,7 @@
                 <a:ea typeface="Hanken Grotesk" pitchFamily="34" charset="-122"/>
                 <a:cs typeface="Hanken Grotesk" pitchFamily="34" charset="-120"/>
               </a:rPr>
-              <a:t>Origin</a:t>
+              <a:t>Pattern</a:t>
             </a:r>
             <a:endParaRPr lang="en-US" sz="900" dirty="0"/>
           </a:p>
@@ -16676,7 +16629,7 @@
                 <a:ea typeface="Hanken Grotesk" pitchFamily="34" charset="-122"/>
                 <a:cs typeface="Hanken Grotesk" pitchFamily="34" charset="-120"/>
               </a:rPr>
-              <a:t>Reveal Math Grade 6  ·  Unit 3  ·  Lesson 3-3</a:t>
+              <a:t>Reveal Math Grade 6  ·  Unit 3  ·  Lesson 3-2</a:t>
             </a:r>
             <a:endParaRPr lang="en-US" sz="750" dirty="0"/>
           </a:p>
@@ -16873,7 +16826,7 @@
                 <a:ea typeface="Hanken Grotesk" pitchFamily="34" charset="-122"/>
                 <a:cs typeface="Hanken Grotesk" pitchFamily="34" charset="-120"/>
               </a:rPr>
-              <a:t>During practice on Graph Ratio Tables, what strategy did you use when a problem felt tricky?</a:t>
+              <a:t>During practice on Ratio Tables, what strategy did you use when a problem felt tricky?</a:t>
             </a:r>
             <a:endParaRPr lang="en-US" sz="1400" dirty="0"/>
           </a:p>
@@ -17203,7 +17156,7 @@
                 <a:ea typeface="Hanken Grotesk" pitchFamily="34" charset="-122"/>
                 <a:cs typeface="Hanken Grotesk" pitchFamily="34" charset="-120"/>
               </a:rPr>
-              <a:t>Coordinate plane</a:t>
+              <a:t>Ratio table</a:t>
             </a:r>
             <a:endParaRPr lang="en-US" sz="900" dirty="0"/>
           </a:p>
@@ -17250,7 +17203,7 @@
                 <a:ea typeface="Hanken Grotesk" pitchFamily="34" charset="-122"/>
                 <a:cs typeface="Hanken Grotesk" pitchFamily="34" charset="-120"/>
               </a:rPr>
-              <a:t>Ordered pair</a:t>
+              <a:t>Equivalent ratio</a:t>
             </a:r>
             <a:endParaRPr lang="en-US" sz="900" dirty="0"/>
           </a:p>
@@ -17297,7 +17250,7 @@
                 <a:ea typeface="Hanken Grotesk" pitchFamily="34" charset="-122"/>
                 <a:cs typeface="Hanken Grotesk" pitchFamily="34" charset="-120"/>
               </a:rPr>
-              <a:t>Linear pattern</a:t>
+              <a:t>Scale factor</a:t>
             </a:r>
             <a:endParaRPr lang="en-US" sz="900" dirty="0"/>
           </a:p>
@@ -17344,7 +17297,7 @@
                 <a:ea typeface="Hanken Grotesk" pitchFamily="34" charset="-122"/>
                 <a:cs typeface="Hanken Grotesk" pitchFamily="34" charset="-120"/>
               </a:rPr>
-              <a:t>Proportional</a:t>
+              <a:t>Pattern</a:t>
             </a:r>
             <a:endParaRPr lang="en-US" sz="900" dirty="0"/>
           </a:p>
@@ -17736,7 +17689,7 @@
                 <a:ea typeface="Hanken Grotesk" pitchFamily="34" charset="-122"/>
                 <a:cs typeface="Hanken Grotesk" pitchFamily="34" charset="-120"/>
               </a:rPr>
-              <a:t>Reveal Math Grade 6  ·  Unit 3  ·  Lesson 3-3</a:t>
+              <a:t>Reveal Math Grade 6  ·  Unit 3  ·  Lesson 3-2</a:t>
             </a:r>
             <a:endParaRPr lang="en-US" sz="750" dirty="0"/>
           </a:p>
@@ -17930,7 +17883,7 @@
                 <a:ea typeface="Hanken Grotesk" pitchFamily="34" charset="-122"/>
                 <a:cs typeface="Hanken Grotesk" pitchFamily="34" charset="-120"/>
               </a:rPr>
-              <a:t>Chef Academy students are tracking how much chocolate sauce they need for different numbers of sundaes. They know the recipe uses 2 ounces of sauce for every 1 sundae. Chef Reyes challenges them to plot the ratio table values on a coordinate grid to see the pattern. Will the points form a straight line?</a:t>
+              <a:t>Chef Academy is hosting a pancake breakfast for the whole school! Chef Reyes's famous pancake batter uses 2 cups of mix for every 3 cups of milk. The team needs to scale the recipe to feed 4 times as many people. Can you help them build a ratio table to figure out how much of each ingredient they need?</a:t>
             </a:r>
             <a:endParaRPr lang="en-US" sz="1150" dirty="0"/>
           </a:p>
@@ -18155,7 +18108,7 @@
                 <a:ea typeface="Hanken Grotesk" pitchFamily="34" charset="-122"/>
                 <a:cs typeface="Hanken Grotesk" pitchFamily="34" charset="-120"/>
               </a:rPr>
-              <a:t>•  What two quantities could we put on the x-axis and y-axis?</a:t>
+              <a:t>•  What two quantities are being compared in the recipe?</a:t>
             </a:r>
             <a:endParaRPr lang="en-US" sz="1000" dirty="0"/>
           </a:p>
@@ -18175,7 +18128,7 @@
                 <a:ea typeface="Hanken Grotesk" pitchFamily="34" charset="-122"/>
                 <a:cs typeface="Hanken Grotesk" pitchFamily="34" charset="-120"/>
               </a:rPr>
-              <a:t>•  What pattern do you see in the ratio table values?</a:t>
+              <a:t>•  What happens to both quantities when you double the recipe?</a:t>
             </a:r>
             <a:endParaRPr lang="en-US" sz="1000" dirty="0"/>
           </a:p>
@@ -18195,7 +18148,7 @@
                 <a:ea typeface="Hanken Grotesk" pitchFamily="34" charset="-122"/>
                 <a:cs typeface="Hanken Grotesk" pitchFamily="34" charset="-120"/>
               </a:rPr>
-              <a:t>•  What do you think the graph will look like?</a:t>
+              <a:t>•  How could a table help you organize the scaling?</a:t>
             </a:r>
             <a:endParaRPr lang="en-US" sz="1000" dirty="0"/>
           </a:p>
@@ -18312,7 +18265,7 @@
                 <a:ea typeface="Hanken Grotesk" pitchFamily="34" charset="-122"/>
                 <a:cs typeface="Hanken Grotesk" pitchFamily="34" charset="-120"/>
               </a:rPr>
-              <a:t>•  What if the points did NOT form a straight line — what would that mean?</a:t>
+              <a:t>•  What if we only needed to make half the original recipe?</a:t>
             </a:r>
             <a:endParaRPr lang="en-US" sz="1000" dirty="0"/>
           </a:p>
@@ -18332,7 +18285,7 @@
                 <a:ea typeface="Hanken Grotesk" pitchFamily="34" charset="-122"/>
                 <a:cs typeface="Hanken Grotesk" pitchFamily="34" charset="-120"/>
               </a:rPr>
-              <a:t>•  Could we use the graph to predict amounts not in our table?</a:t>
+              <a:t>•  Is there a shortcut to find any row in the table without filling every row?</a:t>
             </a:r>
             <a:endParaRPr lang="en-US" sz="1000" dirty="0"/>
           </a:p>
@@ -18724,7 +18677,7 @@
                 <a:ea typeface="Hanken Grotesk" pitchFamily="34" charset="-122"/>
                 <a:cs typeface="Hanken Grotesk" pitchFamily="34" charset="-120"/>
               </a:rPr>
-              <a:t>Reveal Math Grade 6  ·  Unit 3  ·  Lesson 3-3</a:t>
+              <a:t>Reveal Math Grade 6  ·  Unit 3  ·  Lesson 3-2</a:t>
             </a:r>
             <a:endParaRPr lang="en-US" sz="750" dirty="0"/>
           </a:p>
@@ -19020,7 +18973,7 @@
                           <a:ea typeface="Hanken Grotesk" pitchFamily="34" charset="-122"/>
                           <a:cs typeface="Hanken Grotesk" pitchFamily="34" charset="-120"/>
                         </a:rPr>
-                        <a:t>Coordinate plane</a:t>
+                        <a:t>Ratio table</a:t>
                       </a:r>
                       <a:pPr indent="0" marL="0">
                         <a:buNone/>
@@ -19044,7 +18997,7 @@
                           <a:ea typeface="Hanken Grotesk" pitchFamily="34" charset="-122"/>
                           <a:cs typeface="Hanken Grotesk" pitchFamily="34" charset="-120"/>
                         </a:rPr>
-                        <a:t>Plano cartesiano</a:t>
+                        <a:t>Tabla de razones</a:t>
                       </a:r>
                       <a:endParaRPr lang="en-US" sz="950" dirty="0">
                         <a:latin typeface="Hanken Grotesk" charset="0"/>
@@ -19112,7 +19065,7 @@
                           <a:ea typeface="Hanken Grotesk" pitchFamily="34" charset="-122"/>
                           <a:cs typeface="Hanken Grotesk" pitchFamily="34" charset="-120"/>
                         </a:rPr>
-                        <a:t>A grid with a line going across and a line going up to plot points.</a:t>
+                        <a:t>A table of equal ratios that shows a pattern.</a:t>
                       </a:r>
                       <a:pPr indent="0" marL="0">
                         <a:buNone/>
@@ -19136,7 +19089,7 @@
                           <a:ea typeface="Hanken Grotesk" pitchFamily="34" charset="-122"/>
                           <a:cs typeface="Hanken Grotesk" pitchFamily="34" charset="-120"/>
                         </a:rPr>
-                        <a:t>Una cuadrícula con una línea horizontal y una vertical para marcar puntos.</a:t>
+                        <a:t>Una tabla de razones iguales que muestra un patrón.</a:t>
                       </a:r>
                       <a:endParaRPr lang="en-US" sz="900" dirty="0">
                         <a:latin typeface="Hanken Grotesk" charset="0"/>
@@ -19204,7 +19157,7 @@
                           <a:ea typeface="Hanken Grotesk" pitchFamily="34" charset="-122"/>
                           <a:cs typeface="Hanken Grotesk" pitchFamily="34" charset="-120"/>
                         </a:rPr>
-                        <a:t>A + shape made by two number lines crossing at the center point (0, 0)</a:t>
+                        <a:t>Cups of juice: 2, 4, 6 | Cups of water: 3, 6, 9</a:t>
                       </a:r>
                       <a:endParaRPr lang="en-US" sz="900" dirty="0">
                         <a:latin typeface="Hanken Grotesk" charset="0"/>
@@ -19274,7 +19227,7 @@
                           <a:ea typeface="Hanken Grotesk" pitchFamily="34" charset="-122"/>
                           <a:cs typeface="Hanken Grotesk" pitchFamily="34" charset="-120"/>
                         </a:rPr>
-                        <a:t>Ordered pair</a:t>
+                        <a:t>Equivalent ratio</a:t>
                       </a:r>
                       <a:pPr indent="0" marL="0">
                         <a:buNone/>
@@ -19298,7 +19251,7 @@
                           <a:ea typeface="Hanken Grotesk" pitchFamily="34" charset="-122"/>
                           <a:cs typeface="Hanken Grotesk" pitchFamily="34" charset="-120"/>
                         </a:rPr>
-                        <a:t>Par ordenado</a:t>
+                        <a:t>Razón equivalente</a:t>
                       </a:r>
                       <a:endParaRPr lang="en-US" sz="950" dirty="0">
                         <a:latin typeface="Hanken Grotesk" charset="0"/>
@@ -19366,7 +19319,7 @@
                           <a:ea typeface="Hanken Grotesk" pitchFamily="34" charset="-122"/>
                           <a:cs typeface="Hanken Grotesk" pitchFamily="34" charset="-120"/>
                         </a:rPr>
-                        <a:t>Two numbers (x, y) that tell where a point is on a grid.</a:t>
+                        <a:t>Two ratios that mean the same thing, like 1:2 and 2:4.</a:t>
                       </a:r>
                       <a:pPr indent="0" marL="0">
                         <a:buNone/>
@@ -19390,7 +19343,7 @@
                           <a:ea typeface="Hanken Grotesk" pitchFamily="34" charset="-122"/>
                           <a:cs typeface="Hanken Grotesk" pitchFamily="34" charset="-120"/>
                         </a:rPr>
-                        <a:t>Dos números (x, y) que dicen dónde está un punto en una cuadrícula.</a:t>
+                        <a:t>Dos razones que significan lo mismo, como 1:2 y 2:4.</a:t>
                       </a:r>
                       <a:endParaRPr lang="en-US" sz="900" dirty="0">
                         <a:latin typeface="Hanken Grotesk" charset="0"/>
@@ -19458,7 +19411,7 @@
                           <a:ea typeface="Hanken Grotesk" pitchFamily="34" charset="-122"/>
                           <a:cs typeface="Hanken Grotesk" pitchFamily="34" charset="-120"/>
                         </a:rPr>
-                        <a:t>(3, 6) means go right 3, up 6</a:t>
+                        <a:t>2:3 = 4:6 = 6:9</a:t>
                       </a:r>
                       <a:endParaRPr lang="en-US" sz="900" dirty="0">
                         <a:latin typeface="Hanken Grotesk" charset="0"/>
@@ -19528,7 +19481,7 @@
                           <a:ea typeface="Hanken Grotesk" pitchFamily="34" charset="-122"/>
                           <a:cs typeface="Hanken Grotesk" pitchFamily="34" charset="-120"/>
                         </a:rPr>
-                        <a:t>Linear pattern</a:t>
+                        <a:t>Scale factor</a:t>
                       </a:r>
                       <a:pPr indent="0" marL="0">
                         <a:buNone/>
@@ -19552,7 +19505,7 @@
                           <a:ea typeface="Hanken Grotesk" pitchFamily="34" charset="-122"/>
                           <a:cs typeface="Hanken Grotesk" pitchFamily="34" charset="-120"/>
                         </a:rPr>
-                        <a:t>Patrón lineal</a:t>
+                        <a:t>Factor de escala</a:t>
                       </a:r>
                       <a:endParaRPr lang="en-US" sz="950" dirty="0">
                         <a:latin typeface="Hanken Grotesk" charset="0"/>
@@ -19620,7 +19573,7 @@
                           <a:ea typeface="Hanken Grotesk" pitchFamily="34" charset="-122"/>
                           <a:cs typeface="Hanken Grotesk" pitchFamily="34" charset="-120"/>
                         </a:rPr>
-                        <a:t>Points that make a straight line on a grid.</a:t>
+                        <a:t>The number you multiply both parts of a ratio by to get an equal ratio.</a:t>
                       </a:r>
                       <a:pPr indent="0" marL="0">
                         <a:buNone/>
@@ -19644,7 +19597,7 @@
                           <a:ea typeface="Hanken Grotesk" pitchFamily="34" charset="-122"/>
                           <a:cs typeface="Hanken Grotesk" pitchFamily="34" charset="-120"/>
                         </a:rPr>
-                        <a:t>Puntos que forman una línea recta en una cuadrícula.</a:t>
+                        <a:t>El número por el que multiplicas ambas partes de una razón para obtener una razón igual.</a:t>
                       </a:r>
                       <a:endParaRPr lang="en-US" sz="900" dirty="0">
                         <a:latin typeface="Hanken Grotesk" charset="0"/>
@@ -19712,7 +19665,7 @@
                           <a:ea typeface="Hanken Grotesk" pitchFamily="34" charset="-122"/>
                           <a:cs typeface="Hanken Grotesk" pitchFamily="34" charset="-120"/>
                         </a:rPr>
-                        <a:t>(1,2), (2,4), (3,6) all line up</a:t>
+                        <a:t>2:3 × 2 → 4:6 (scale factor is 2)</a:t>
                       </a:r>
                       <a:endParaRPr lang="en-US" sz="900" dirty="0">
                         <a:latin typeface="Hanken Grotesk" charset="0"/>
@@ -19782,7 +19735,7 @@
                           <a:ea typeface="Hanken Grotesk" pitchFamily="34" charset="-122"/>
                           <a:cs typeface="Hanken Grotesk" pitchFamily="34" charset="-120"/>
                         </a:rPr>
-                        <a:t>Proportional</a:t>
+                        <a:t>Pattern</a:t>
                       </a:r>
                       <a:pPr indent="0" marL="0">
                         <a:buNone/>
@@ -19806,7 +19759,7 @@
                           <a:ea typeface="Hanken Grotesk" pitchFamily="34" charset="-122"/>
                           <a:cs typeface="Hanken Grotesk" pitchFamily="34" charset="-120"/>
                         </a:rPr>
-                        <a:t>Proporcional</a:t>
+                        <a:t>Patrón</a:t>
                       </a:r>
                       <a:endParaRPr lang="en-US" sz="950" dirty="0">
                         <a:latin typeface="Hanken Grotesk" charset="0"/>
@@ -19874,7 +19827,7 @@
                           <a:ea typeface="Hanken Grotesk" pitchFamily="34" charset="-122"/>
                           <a:cs typeface="Hanken Grotesk" pitchFamily="34" charset="-120"/>
                         </a:rPr>
-                        <a:t>Two amounts that grow together at the same rate.</a:t>
+                        <a:t>A rule that numbers follow again and again.</a:t>
                       </a:r>
                       <a:pPr indent="0" marL="0">
                         <a:buNone/>
@@ -19898,7 +19851,7 @@
                           <a:ea typeface="Hanken Grotesk" pitchFamily="34" charset="-122"/>
                           <a:cs typeface="Hanken Grotesk" pitchFamily="34" charset="-120"/>
                         </a:rPr>
-                        <a:t>Dos cantidades que crecen juntas al mismo ritmo.</a:t>
+                        <a:t>Una regla que los números siguen una y otra vez.</a:t>
                       </a:r>
                       <a:endParaRPr lang="en-US" sz="900" dirty="0">
                         <a:latin typeface="Hanken Grotesk" charset="0"/>
@@ -19966,7 +19919,7 @@
                           <a:ea typeface="Hanken Grotesk" pitchFamily="34" charset="-122"/>
                           <a:cs typeface="Hanken Grotesk" pitchFamily="34" charset="-120"/>
                         </a:rPr>
-                        <a:t>A straight line from (0,0) through (2,6) and (4,12)</a:t>
+                        <a:t>Each row adds 2 cups juice and 3 cups water</a:t>
                       </a:r>
                       <a:endParaRPr lang="en-US" sz="900" dirty="0">
                         <a:latin typeface="Hanken Grotesk" charset="0"/>
@@ -20036,7 +19989,7 @@
                           <a:ea typeface="Hanken Grotesk" pitchFamily="34" charset="-122"/>
                           <a:cs typeface="Hanken Grotesk" pitchFamily="34" charset="-120"/>
                         </a:rPr>
-                        <a:t>Origin</a:t>
+                        <a:t>Additive pattern</a:t>
                       </a:r>
                       <a:pPr indent="0" marL="0">
                         <a:buNone/>
@@ -20060,7 +20013,7 @@
                           <a:ea typeface="Hanken Grotesk" pitchFamily="34" charset="-122"/>
                           <a:cs typeface="Hanken Grotesk" pitchFamily="34" charset="-120"/>
                         </a:rPr>
-                        <a:t>Origen</a:t>
+                        <a:t>Patrón aditivo</a:t>
                       </a:r>
                       <a:endParaRPr lang="en-US" sz="950" dirty="0">
                         <a:latin typeface="Hanken Grotesk" charset="0"/>
@@ -20128,7 +20081,7 @@
                           <a:ea typeface="Hanken Grotesk" pitchFamily="34" charset="-122"/>
                           <a:cs typeface="Hanken Grotesk" pitchFamily="34" charset="-120"/>
                         </a:rPr>
-                        <a:t>The point (0, 0) where the two grid lines cross.</a:t>
+                        <a:t>Adding the same amount to both parts of a ratio table to make new rows.</a:t>
                       </a:r>
                       <a:pPr indent="0" marL="0">
                         <a:buNone/>
@@ -20152,7 +20105,7 @@
                           <a:ea typeface="Hanken Grotesk" pitchFamily="34" charset="-122"/>
                           <a:cs typeface="Hanken Grotesk" pitchFamily="34" charset="-120"/>
                         </a:rPr>
-                        <a:t>El punto (0, 0) donde se cruzan las dos líneas de la cuadrícula.</a:t>
+                        <a:t>Sumar la misma cantidad a ambas partes de una tabla de razones para hacer filas nuevas.</a:t>
                       </a:r>
                       <a:endParaRPr lang="en-US" sz="900" dirty="0">
                         <a:latin typeface="Hanken Grotesk" charset="0"/>
@@ -20220,7 +20173,7 @@
                           <a:ea typeface="Hanken Grotesk" pitchFamily="34" charset="-122"/>
                           <a:cs typeface="Hanken Grotesk" pitchFamily="34" charset="-120"/>
                         </a:rPr>
-                        <a:t>The starting corner of the grid at (0, 0)</a:t>
+                        <a:t>2:3 → 4:6 → 6:9 (add 2 and 3 each time)</a:t>
                       </a:r>
                       <a:endParaRPr lang="en-US" sz="900" dirty="0">
                         <a:latin typeface="Hanken Grotesk" charset="0"/>
@@ -20662,7 +20615,7 @@
                 <a:ea typeface="Hanken Grotesk" pitchFamily="34" charset="-122"/>
                 <a:cs typeface="Hanken Grotesk" pitchFamily="34" charset="-120"/>
               </a:rPr>
-              <a:t>Reveal Math Grade 6  ·  Unit 3  ·  Lesson 3-3</a:t>
+              <a:t>Reveal Math Grade 6  ·  Unit 3  ·  Lesson 3-2</a:t>
             </a:r>
             <a:endParaRPr lang="en-US" sz="750" dirty="0"/>
           </a:p>
@@ -20817,7 +20770,7 @@
                 <a:ea typeface="Outfit" pitchFamily="34" charset="-122"/>
                 <a:cs typeface="Outfit" pitchFamily="34" charset="-120"/>
               </a:rPr>
-              <a:t>How do we graph a ratio table?</a:t>
+              <a:t>How do ratio tables work?</a:t>
             </a:r>
             <a:endParaRPr lang="en-US" sz="1200" dirty="0"/>
           </a:p>
@@ -20915,7 +20868,7 @@
                 <a:ea typeface="Hanken Grotesk" pitchFamily="34" charset="-122"/>
                 <a:cs typeface="Hanken Grotesk" pitchFamily="34" charset="-120"/>
               </a:rPr>
-              <a:t>A recipe uses 1 cup of sugar for every 3 cups of flour.</a:t>
+              <a:t>A drink uses 1 cup of juice for every 4 cups of water, so the ratio is 1:4.</a:t>
             </a:r>
             <a:endParaRPr lang="en-US" sz="1050" dirty="0"/>
           </a:p>
@@ -21013,7 +20966,7 @@
                 <a:ea typeface="Hanken Grotesk" pitchFamily="34" charset="-122"/>
                 <a:cs typeface="Hanken Grotesk" pitchFamily="34" charset="-120"/>
               </a:rPr>
-              <a:t>For 1 cup of sugar, the ordered pair is (1, 3): right 1, up 3.</a:t>
+              <a:t>To double it, what scale factor do we use? We use 2.</a:t>
             </a:r>
             <a:endParaRPr lang="en-US" sz="1050" dirty="0"/>
           </a:p>
@@ -21111,7 +21064,7 @@
                 <a:ea typeface="Hanken Grotesk" pitchFamily="34" charset="-122"/>
                 <a:cs typeface="Hanken Grotesk" pitchFamily="34" charset="-120"/>
               </a:rPr>
-              <a:t>For 2 cups of sugar, what is the pair? It is (2, 6): right 2, up 6.</a:t>
+              <a:t>Multiply both by 2: 1 x 2 = 2 cups of juice and 4 x 2 = 8 cups of water, giving 2:8.</a:t>
             </a:r>
             <a:endParaRPr lang="en-US" sz="1050" dirty="0"/>
           </a:p>
@@ -21287,7 +21240,7 @@
                 <a:ea typeface="Hanken Grotesk" pitchFamily="34" charset="-122"/>
                 <a:cs typeface="Hanken Grotesk" pitchFamily="34" charset="-120"/>
               </a:rPr>
-              <a:t>The sundae recipe uses 2 ounces of chocolate sauce for every 1 sundae. Before you graph, what do you predict the points will look like, and which quantity goes on each axis?</a:t>
+              <a:t>Chef Reyes's pancake batter uses 2 cups of mix for every 3 cups of milk. To feed 4 times as many people, what happens to BOTH ingredient amounts?</a:t>
             </a:r>
             <a:endParaRPr lang="en-US" sz="1000" dirty="0"/>
           </a:p>
@@ -21399,7 +21352,7 @@
                 <a:ea typeface="Hanken Grotesk" pitchFamily="34" charset="-122"/>
                 <a:cs typeface="Hanken Grotesk" pitchFamily="34" charset="-120"/>
               </a:rPr>
-              <a:t>The points from equal ratios form a straight line that passes through the origin (0, 0).</a:t>
+              <a:t>To keep a ratio the same, multiply both numbers by the same scale factor.</a:t>
             </a:r>
             <a:endParaRPr lang="en-US" sz="950" dirty="0"/>
           </a:p>
